--- a/docs/아카팀플0608.pptx
+++ b/docs/아카팀플0608.pptx
@@ -154,7 +154,7 @@
         <p:txBody>
           <a:bodyPr/>
           <a:p>
-            <a:fld id="{73155A1D-F088-4948-A1D3-9AC218B5B383}" type="slidenum">
+            <a:fld id="{2A0AF08B-6632-492F-AFEE-DF0E90B5498F}" type="slidenum">
               <a:t>&lt;#&gt;</a:t>
             </a:fld>
           </a:p>
@@ -237,7 +237,7 @@
         <p:txBody>
           <a:bodyPr/>
           <a:p>
-            <a:fld id="{F34CF43C-0B8C-45BC-B407-FA0FC610CA1B}" type="slidenum">
+            <a:fld id="{A10837D4-B374-4210-80F0-9AF19A6B5355}" type="slidenum">
               <a:t>&lt;#&gt;</a:t>
             </a:fld>
           </a:p>
@@ -320,7 +320,7 @@
         <p:txBody>
           <a:bodyPr/>
           <a:p>
-            <a:fld id="{6B261593-1901-460C-8923-198EFE34BAB3}" type="slidenum">
+            <a:fld id="{0FC9C7F8-1D03-4B81-81EA-A7E8431037CC}" type="slidenum">
               <a:t>&lt;#&gt;</a:t>
             </a:fld>
           </a:p>
@@ -403,7 +403,7 @@
         <p:txBody>
           <a:bodyPr/>
           <a:p>
-            <a:fld id="{587F8DB6-1DF2-4950-855C-9D4C51BBC255}" type="slidenum">
+            <a:fld id="{9408A28E-0C13-41C1-AA17-7961C8BDE76B}" type="slidenum">
               <a:t>&lt;#&gt;</a:t>
             </a:fld>
           </a:p>
@@ -486,7 +486,7 @@
         <p:txBody>
           <a:bodyPr/>
           <a:p>
-            <a:fld id="{7FD7790B-6FD5-4084-AA65-E1E684ADFB1A}" type="slidenum">
+            <a:fld id="{B49B5CE8-8211-4D47-B2AC-24A3E2521EF5}" type="slidenum">
               <a:t>&lt;#&gt;</a:t>
             </a:fld>
           </a:p>
@@ -652,7 +652,7 @@
         <p:txBody>
           <a:bodyPr/>
           <a:p>
-            <a:fld id="{19C75705-28C8-4381-A3DD-A39D40B93399}" type="slidenum">
+            <a:fld id="{F97D75CA-E7CE-419D-B69F-B364D67D4605}" type="slidenum">
               <a:t>&lt;#&gt;</a:t>
             </a:fld>
           </a:p>
@@ -735,7 +735,7 @@
         <p:txBody>
           <a:bodyPr/>
           <a:p>
-            <a:fld id="{157B4F70-EFD4-4427-B0CF-114ACEDC68AE}" type="slidenum">
+            <a:fld id="{9D52C285-0307-4751-AE12-902BC15B3911}" type="slidenum">
               <a:t>&lt;#&gt;</a:t>
             </a:fld>
           </a:p>
@@ -944,7 +944,7 @@
         <p:txBody>
           <a:bodyPr/>
           <a:p>
-            <a:fld id="{8C7F759A-D4CE-4219-BE94-3D234EE368BC}" type="slidenum">
+            <a:fld id="{9114A394-B507-44E3-A1C3-9807DDB3784D}" type="slidenum">
               <a:t>&lt;#&gt;</a:t>
             </a:fld>
           </a:p>
@@ -1027,7 +1027,7 @@
         <p:txBody>
           <a:bodyPr/>
           <a:p>
-            <a:fld id="{D25E516D-F71A-42F5-B2A1-F94C48FC0E63}" type="slidenum">
+            <a:fld id="{9CA90186-64BD-4CCA-A677-9BE595CE6EF8}" type="slidenum">
               <a:t>&lt;#&gt;</a:t>
             </a:fld>
           </a:p>
@@ -1150,7 +1150,7 @@
         <p:txBody>
           <a:bodyPr/>
           <a:p>
-            <a:fld id="{DA07A24A-8324-4BF7-A46B-9CC1EF3628C3}" type="slidenum">
+            <a:fld id="{E7005255-6724-4AAC-B080-9B1C5F0C703B}" type="slidenum">
               <a:t>&lt;#&gt;</a:t>
             </a:fld>
           </a:p>
@@ -1233,7 +1233,7 @@
         <p:txBody>
           <a:bodyPr/>
           <a:p>
-            <a:fld id="{5EFB402F-02A0-41D3-AF9B-676360062B10}" type="slidenum">
+            <a:fld id="{EC16AF34-4298-4616-8D7C-BBFD0E2D44D5}" type="slidenum">
               <a:t>&lt;#&gt;</a:t>
             </a:fld>
           </a:p>
@@ -1360,7 +1360,7 @@
         <p:spPr>
           <a:xfrm>
             <a:off x="4038480" y="6356520"/>
-            <a:ext cx="4114080" cy="364320"/>
+            <a:ext cx="4113360" cy="363600"/>
           </a:xfrm>
           <a:prstGeom prst="rect">
             <a:avLst/>
@@ -1432,7 +1432,7 @@
         <p:spPr>
           <a:xfrm>
             <a:off x="8610480" y="6356520"/>
-            <a:ext cx="2742480" cy="364320"/>
+            <a:ext cx="2741760" cy="363600"/>
           </a:xfrm>
           <a:prstGeom prst="rect">
             <a:avLst/>
@@ -1475,7 +1475,7 @@
                 <a:tab algn="l" pos="0"/>
               </a:tabLst>
             </a:pPr>
-            <a:fld id="{AEA70903-2223-4B8D-8B28-3A9DE9CB316A}" type="slidenum">
+            <a:fld id="{C6C0943A-3858-41CE-9F03-D1F9AA756C62}" type="slidenum">
               <a:rPr b="0" lang="en-US" sz="1200" spc="-1" strike="noStrike">
                 <a:solidFill>
                   <a:schemeClr val="dk1">
@@ -1508,7 +1508,7 @@
         <p:spPr>
           <a:xfrm>
             <a:off x="838080" y="6356520"/>
-            <a:ext cx="2742480" cy="364320"/>
+            <a:ext cx="2741760" cy="363600"/>
           </a:xfrm>
           <a:prstGeom prst="rect">
             <a:avLst/>
@@ -1601,7 +1601,7 @@
         <p:spPr>
           <a:xfrm>
             <a:off x="4038480" y="6356520"/>
-            <a:ext cx="4114080" cy="364320"/>
+            <a:ext cx="4113360" cy="363600"/>
           </a:xfrm>
           <a:prstGeom prst="rect">
             <a:avLst/>
@@ -1673,7 +1673,7 @@
         <p:spPr>
           <a:xfrm>
             <a:off x="8610480" y="6356520"/>
-            <a:ext cx="2742480" cy="364320"/>
+            <a:ext cx="2741760" cy="363600"/>
           </a:xfrm>
           <a:prstGeom prst="rect">
             <a:avLst/>
@@ -1716,7 +1716,7 @@
                 <a:tab algn="l" pos="0"/>
               </a:tabLst>
             </a:pPr>
-            <a:fld id="{F9E0FC5D-454D-43A9-B87B-99DC05E316D5}" type="slidenum">
+            <a:fld id="{A992CED1-9535-465A-BC6B-7F14D9B12856}" type="slidenum">
               <a:rPr b="0" lang="en-US" sz="1200" spc="-1" strike="noStrike">
                 <a:solidFill>
                   <a:schemeClr val="dk1">
@@ -1749,7 +1749,7 @@
         <p:spPr>
           <a:xfrm>
             <a:off x="838080" y="6356520"/>
-            <a:ext cx="2742480" cy="364320"/>
+            <a:ext cx="2741760" cy="363600"/>
           </a:xfrm>
           <a:prstGeom prst="rect">
             <a:avLst/>
@@ -1842,7 +1842,7 @@
         <p:spPr>
           <a:xfrm>
             <a:off x="4038480" y="6356520"/>
-            <a:ext cx="4114080" cy="364320"/>
+            <a:ext cx="4113360" cy="363600"/>
           </a:xfrm>
           <a:prstGeom prst="rect">
             <a:avLst/>
@@ -1914,7 +1914,7 @@
         <p:spPr>
           <a:xfrm>
             <a:off x="8610480" y="6356520"/>
-            <a:ext cx="2742480" cy="364320"/>
+            <a:ext cx="2741760" cy="363600"/>
           </a:xfrm>
           <a:prstGeom prst="rect">
             <a:avLst/>
@@ -1957,7 +1957,7 @@
                 <a:tab algn="l" pos="0"/>
               </a:tabLst>
             </a:pPr>
-            <a:fld id="{614783D4-EA83-44A8-8ACB-E82AAB93D8B8}" type="slidenum">
+            <a:fld id="{631F54EB-42A1-419C-9374-03523CE603FC}" type="slidenum">
               <a:rPr b="0" lang="en-US" sz="1200" spc="-1" strike="noStrike">
                 <a:solidFill>
                   <a:schemeClr val="dk1">
@@ -1990,7 +1990,7 @@
         <p:spPr>
           <a:xfrm>
             <a:off x="838080" y="6356520"/>
-            <a:ext cx="2742480" cy="364320"/>
+            <a:ext cx="2741760" cy="363600"/>
           </a:xfrm>
           <a:prstGeom prst="rect">
             <a:avLst/>
@@ -2083,7 +2083,7 @@
         <p:spPr>
           <a:xfrm>
             <a:off x="4038480" y="6356520"/>
-            <a:ext cx="4114080" cy="364320"/>
+            <a:ext cx="4113360" cy="363600"/>
           </a:xfrm>
           <a:prstGeom prst="rect">
             <a:avLst/>
@@ -2155,7 +2155,7 @@
         <p:spPr>
           <a:xfrm>
             <a:off x="8610480" y="6356520"/>
-            <a:ext cx="2742480" cy="364320"/>
+            <a:ext cx="2741760" cy="363600"/>
           </a:xfrm>
           <a:prstGeom prst="rect">
             <a:avLst/>
@@ -2198,7 +2198,7 @@
                 <a:tab algn="l" pos="0"/>
               </a:tabLst>
             </a:pPr>
-            <a:fld id="{BD2EFC86-71EF-4580-A04F-F5DC3970221B}" type="slidenum">
+            <a:fld id="{ADD1E09F-8F3A-4B09-A28D-B06581743E7D}" type="slidenum">
               <a:rPr b="0" lang="en-US" sz="1200" spc="-1" strike="noStrike">
                 <a:solidFill>
                   <a:schemeClr val="dk1">
@@ -2231,7 +2231,7 @@
         <p:spPr>
           <a:xfrm>
             <a:off x="838080" y="6356520"/>
-            <a:ext cx="2742480" cy="364320"/>
+            <a:ext cx="2741760" cy="363600"/>
           </a:xfrm>
           <a:prstGeom prst="rect">
             <a:avLst/>
@@ -2324,7 +2324,7 @@
         <p:spPr>
           <a:xfrm>
             <a:off x="4038480" y="6356520"/>
-            <a:ext cx="4114080" cy="364320"/>
+            <a:ext cx="4113360" cy="363600"/>
           </a:xfrm>
           <a:prstGeom prst="rect">
             <a:avLst/>
@@ -2396,7 +2396,7 @@
         <p:spPr>
           <a:xfrm>
             <a:off x="8610480" y="6356520"/>
-            <a:ext cx="2742480" cy="364320"/>
+            <a:ext cx="2741760" cy="363600"/>
           </a:xfrm>
           <a:prstGeom prst="rect">
             <a:avLst/>
@@ -2439,7 +2439,7 @@
                 <a:tab algn="l" pos="0"/>
               </a:tabLst>
             </a:pPr>
-            <a:fld id="{753C8EE5-42D7-48A1-943F-ED70E199E958}" type="slidenum">
+            <a:fld id="{D74CEB3D-0C63-4C7A-BDF1-A35EC324A1E8}" type="slidenum">
               <a:rPr b="0" lang="en-US" sz="1200" spc="-1" strike="noStrike">
                 <a:solidFill>
                   <a:schemeClr val="dk1">
@@ -2472,7 +2472,7 @@
         <p:spPr>
           <a:xfrm>
             <a:off x="838080" y="6356520"/>
-            <a:ext cx="2742480" cy="364320"/>
+            <a:ext cx="2741760" cy="363600"/>
           </a:xfrm>
           <a:prstGeom prst="rect">
             <a:avLst/>
@@ -2902,7 +2902,7 @@
         <p:spPr>
           <a:xfrm>
             <a:off x="4038480" y="6356520"/>
-            <a:ext cx="4114080" cy="364320"/>
+            <a:ext cx="4113360" cy="363600"/>
           </a:xfrm>
           <a:prstGeom prst="rect">
             <a:avLst/>
@@ -2974,7 +2974,7 @@
         <p:spPr>
           <a:xfrm>
             <a:off x="8610480" y="6356520"/>
-            <a:ext cx="2742480" cy="364320"/>
+            <a:ext cx="2741760" cy="363600"/>
           </a:xfrm>
           <a:prstGeom prst="rect">
             <a:avLst/>
@@ -3017,7 +3017,7 @@
                 <a:tab algn="l" pos="0"/>
               </a:tabLst>
             </a:pPr>
-            <a:fld id="{53C68EDF-0D80-4191-B252-6CD0FF1D5820}" type="slidenum">
+            <a:fld id="{616D3C6D-3126-4498-AE2E-E9F7DEBE2D80}" type="slidenum">
               <a:rPr b="0" lang="en-US" sz="1200" spc="-1" strike="noStrike">
                 <a:solidFill>
                   <a:schemeClr val="dk1">
@@ -3050,7 +3050,7 @@
         <p:spPr>
           <a:xfrm>
             <a:off x="838080" y="6356520"/>
-            <a:ext cx="2742480" cy="364320"/>
+            <a:ext cx="2741760" cy="363600"/>
           </a:xfrm>
           <a:prstGeom prst="rect">
             <a:avLst/>
@@ -3143,7 +3143,7 @@
         <p:spPr>
           <a:xfrm>
             <a:off x="4038480" y="6356520"/>
-            <a:ext cx="4114080" cy="364320"/>
+            <a:ext cx="4113360" cy="363600"/>
           </a:xfrm>
           <a:prstGeom prst="rect">
             <a:avLst/>
@@ -3215,7 +3215,7 @@
         <p:spPr>
           <a:xfrm>
             <a:off x="8610480" y="6356520"/>
-            <a:ext cx="2742480" cy="364320"/>
+            <a:ext cx="2741760" cy="363600"/>
           </a:xfrm>
           <a:prstGeom prst="rect">
             <a:avLst/>
@@ -3258,7 +3258,7 @@
                 <a:tab algn="l" pos="0"/>
               </a:tabLst>
             </a:pPr>
-            <a:fld id="{B31CF86F-2ACA-42B1-9F46-54189E0D1686}" type="slidenum">
+            <a:fld id="{50F78B41-C3EF-40F1-B00C-EE21BCD674E8}" type="slidenum">
               <a:rPr b="0" lang="en-US" sz="1200" spc="-1" strike="noStrike">
                 <a:solidFill>
                   <a:schemeClr val="dk1">
@@ -3291,7 +3291,7 @@
         <p:spPr>
           <a:xfrm>
             <a:off x="838080" y="6356520"/>
-            <a:ext cx="2742480" cy="364320"/>
+            <a:ext cx="2741760" cy="363600"/>
           </a:xfrm>
           <a:prstGeom prst="rect">
             <a:avLst/>
@@ -4000,7 +4000,7 @@
         <p:spPr>
           <a:xfrm>
             <a:off x="4038480" y="6356520"/>
-            <a:ext cx="4114080" cy="364320"/>
+            <a:ext cx="4113360" cy="363600"/>
           </a:xfrm>
           <a:prstGeom prst="rect">
             <a:avLst/>
@@ -4072,7 +4072,7 @@
         <p:spPr>
           <a:xfrm>
             <a:off x="8610480" y="6356520"/>
-            <a:ext cx="2742480" cy="364320"/>
+            <a:ext cx="2741760" cy="363600"/>
           </a:xfrm>
           <a:prstGeom prst="rect">
             <a:avLst/>
@@ -4115,7 +4115,7 @@
                 <a:tab algn="l" pos="0"/>
               </a:tabLst>
             </a:pPr>
-            <a:fld id="{1955C8C2-72BB-4C9C-B6FC-B03E43B2A15A}" type="slidenum">
+            <a:fld id="{C837BBA0-8412-46CF-91F4-738CB195C0FB}" type="slidenum">
               <a:rPr b="0" lang="en-US" sz="1200" spc="-1" strike="noStrike">
                 <a:solidFill>
                   <a:schemeClr val="dk1">
@@ -4148,7 +4148,7 @@
         <p:spPr>
           <a:xfrm>
             <a:off x="838080" y="6356520"/>
-            <a:ext cx="2742480" cy="364320"/>
+            <a:ext cx="2741760" cy="363600"/>
           </a:xfrm>
           <a:prstGeom prst="rect">
             <a:avLst/>
@@ -4241,7 +4241,7 @@
         <p:spPr>
           <a:xfrm>
             <a:off x="4038480" y="6356520"/>
-            <a:ext cx="4114080" cy="364320"/>
+            <a:ext cx="4113360" cy="363600"/>
           </a:xfrm>
           <a:prstGeom prst="rect">
             <a:avLst/>
@@ -4313,7 +4313,7 @@
         <p:spPr>
           <a:xfrm>
             <a:off x="8610480" y="6356520"/>
-            <a:ext cx="2742480" cy="364320"/>
+            <a:ext cx="2741760" cy="363600"/>
           </a:xfrm>
           <a:prstGeom prst="rect">
             <a:avLst/>
@@ -4356,7 +4356,7 @@
                 <a:tab algn="l" pos="0"/>
               </a:tabLst>
             </a:pPr>
-            <a:fld id="{7A7A02BD-9248-4E2B-81C0-AC1DA52DF6CD}" type="slidenum">
+            <a:fld id="{12D96495-015E-4355-BF92-4E0324EA3289}" type="slidenum">
               <a:rPr b="0" lang="en-US" sz="1200" spc="-1" strike="noStrike">
                 <a:solidFill>
                   <a:schemeClr val="dk1">
@@ -4389,7 +4389,7 @@
         <p:spPr>
           <a:xfrm>
             <a:off x="838080" y="6356520"/>
-            <a:ext cx="2742480" cy="364320"/>
+            <a:ext cx="2741760" cy="363600"/>
           </a:xfrm>
           <a:prstGeom prst="rect">
             <a:avLst/>
@@ -4540,7 +4540,7 @@
         <p:spPr>
           <a:xfrm>
             <a:off x="4038480" y="6356520"/>
-            <a:ext cx="4114080" cy="364320"/>
+            <a:ext cx="4113360" cy="363600"/>
           </a:xfrm>
           <a:prstGeom prst="rect">
             <a:avLst/>
@@ -4612,7 +4612,7 @@
         <p:spPr>
           <a:xfrm>
             <a:off x="8610480" y="6356520"/>
-            <a:ext cx="2742480" cy="364320"/>
+            <a:ext cx="2741760" cy="363600"/>
           </a:xfrm>
           <a:prstGeom prst="rect">
             <a:avLst/>
@@ -4655,7 +4655,7 @@
                 <a:tab algn="l" pos="0"/>
               </a:tabLst>
             </a:pPr>
-            <a:fld id="{A062CF95-E43B-4FB7-8B76-B8A254AC912F}" type="slidenum">
+            <a:fld id="{3692FF60-B486-4CFD-A411-A2A78F623DF1}" type="slidenum">
               <a:rPr b="0" lang="en-US" sz="1200" spc="-1" strike="noStrike">
                 <a:solidFill>
                   <a:schemeClr val="dk1">
@@ -4688,7 +4688,7 @@
         <p:spPr>
           <a:xfrm>
             <a:off x="838080" y="6356520"/>
-            <a:ext cx="2742480" cy="364320"/>
+            <a:ext cx="2741760" cy="363600"/>
           </a:xfrm>
           <a:prstGeom prst="rect">
             <a:avLst/>
@@ -4781,7 +4781,7 @@
         <p:spPr>
           <a:xfrm>
             <a:off x="4038480" y="6356520"/>
-            <a:ext cx="4114080" cy="364320"/>
+            <a:ext cx="4113360" cy="363600"/>
           </a:xfrm>
           <a:prstGeom prst="rect">
             <a:avLst/>
@@ -4853,7 +4853,7 @@
         <p:spPr>
           <a:xfrm>
             <a:off x="8610480" y="6356520"/>
-            <a:ext cx="2742480" cy="364320"/>
+            <a:ext cx="2741760" cy="363600"/>
           </a:xfrm>
           <a:prstGeom prst="rect">
             <a:avLst/>
@@ -4896,7 +4896,7 @@
                 <a:tab algn="l" pos="0"/>
               </a:tabLst>
             </a:pPr>
-            <a:fld id="{2D8A6AD6-E9BE-4786-BE18-3F63EAA4A33D}" type="slidenum">
+            <a:fld id="{86E6ACDC-71C4-4D00-BAD7-2FBA5845F688}" type="slidenum">
               <a:rPr b="0" lang="en-US" sz="1200" spc="-1" strike="noStrike">
                 <a:solidFill>
                   <a:schemeClr val="dk1">
@@ -4929,7 +4929,7 @@
         <p:spPr>
           <a:xfrm>
             <a:off x="838080" y="6356520"/>
-            <a:ext cx="2742480" cy="364320"/>
+            <a:ext cx="2741760" cy="363600"/>
           </a:xfrm>
           <a:prstGeom prst="rect">
             <a:avLst/>
@@ -5352,7 +5352,7 @@
         <p:spPr>
           <a:xfrm>
             <a:off x="6543720" y="3786480"/>
-            <a:ext cx="368640" cy="368640"/>
+            <a:ext cx="367920" cy="367920"/>
           </a:xfrm>
           <a:prstGeom prst="rect">
             <a:avLst/>
@@ -5375,7 +5375,7 @@
         <p:spPr>
           <a:xfrm>
             <a:off x="6565680" y="4558320"/>
-            <a:ext cx="368640" cy="368640"/>
+            <a:ext cx="367920" cy="367920"/>
           </a:xfrm>
           <a:prstGeom prst="rect">
             <a:avLst/>
@@ -5394,7 +5394,7 @@
         <p:spPr>
           <a:xfrm>
             <a:off x="1478160" y="1839240"/>
-            <a:ext cx="3030480" cy="699120"/>
+            <a:ext cx="3029760" cy="699120"/>
           </a:xfrm>
           <a:prstGeom prst="rect">
             <a:avLst/>
@@ -5458,7 +5458,7 @@
         <p:spPr>
           <a:xfrm>
             <a:off x="360000" y="356400"/>
-            <a:ext cx="11508480" cy="6483240"/>
+            <a:ext cx="11507760" cy="6482520"/>
           </a:xfrm>
           <a:prstGeom prst="rect">
             <a:avLst/>
@@ -5519,7 +5519,7 @@
         <p:spPr>
           <a:xfrm>
             <a:off x="671760" y="848160"/>
-            <a:ext cx="10969920" cy="720"/>
+            <a:ext cx="10970640" cy="1440"/>
           </a:xfrm>
           <a:prstGeom prst="straightConnector1">
             <a:avLst/>
@@ -5541,7 +5541,7 @@
         <p:spPr>
           <a:xfrm>
             <a:off x="621360" y="810000"/>
-            <a:ext cx="1863720" cy="87840"/>
+            <a:ext cx="1863000" cy="87120"/>
           </a:xfrm>
           <a:prstGeom prst="rect">
             <a:avLst/>
@@ -5588,7 +5588,7 @@
         <p:spPr>
           <a:xfrm>
             <a:off x="569160" y="471240"/>
-            <a:ext cx="1488600" cy="363600"/>
+            <a:ext cx="1487880" cy="363600"/>
           </a:xfrm>
           <a:prstGeom prst="rect">
             <a:avLst/>
@@ -5646,7 +5646,7 @@
         <p:spPr>
           <a:xfrm>
             <a:off x="866520" y="430920"/>
-            <a:ext cx="2126520" cy="363600"/>
+            <a:ext cx="2125800" cy="363600"/>
           </a:xfrm>
           <a:prstGeom prst="rect">
             <a:avLst/>
@@ -5714,7 +5714,7 @@
         <p:spPr>
           <a:xfrm>
             <a:off x="619560" y="1116000"/>
-            <a:ext cx="10720080" cy="5576040"/>
+            <a:ext cx="10719360" cy="5576040"/>
           </a:xfrm>
           <a:prstGeom prst="rect">
             <a:avLst/>
@@ -6532,7 +6532,7 @@
         <p:spPr>
           <a:xfrm>
             <a:off x="2520000" y="1440000"/>
-            <a:ext cx="4649040" cy="272520"/>
+            <a:ext cx="4648320" cy="272520"/>
           </a:xfrm>
           <a:prstGeom prst="rect">
             <a:avLst/>
@@ -6600,7 +6600,7 @@
         <p:spPr>
           <a:xfrm>
             <a:off x="2520000" y="1839240"/>
-            <a:ext cx="4499640" cy="272520"/>
+            <a:ext cx="4498920" cy="272520"/>
           </a:xfrm>
           <a:prstGeom prst="rect">
             <a:avLst/>
@@ -6692,9 +6692,9 @@
         <p:grpSpPr>
           <a:xfrm>
             <a:off x="2520000" y="1922760"/>
-            <a:ext cx="5972040" cy="1496880"/>
+            <a:ext cx="5971320" cy="1496160"/>
             <a:chOff x="2520000" y="1922760"/>
-            <a:chExt cx="5972040" cy="1496880"/>
+            <a:chExt cx="5971320" cy="1496160"/>
           </a:xfrm>
         </p:grpSpPr>
         <p:sp>
@@ -6706,7 +6706,7 @@
           <p:spPr>
             <a:xfrm>
               <a:off x="2520000" y="2348280"/>
-              <a:ext cx="5972040" cy="272520"/>
+              <a:ext cx="5971320" cy="272520"/>
             </a:xfrm>
             <a:prstGeom prst="rect">
               <a:avLst/>
@@ -6870,7 +6870,7 @@
           <p:spPr>
             <a:xfrm>
               <a:off x="3373560" y="3273120"/>
-              <a:ext cx="984240" cy="146520"/>
+              <a:ext cx="983520" cy="145800"/>
             </a:xfrm>
             <a:prstGeom prst="borderCallout2">
               <a:avLst>
@@ -6967,7 +6967,7 @@
           <p:spPr>
             <a:xfrm>
               <a:off x="4881240" y="1922760"/>
-              <a:ext cx="984240" cy="146520"/>
+              <a:ext cx="983520" cy="145800"/>
             </a:xfrm>
             <a:prstGeom prst="borderCallout2">
               <a:avLst>
@@ -7064,7 +7064,7 @@
           <p:spPr>
             <a:xfrm>
               <a:off x="3782160" y="3082320"/>
-              <a:ext cx="984240" cy="146520"/>
+              <a:ext cx="983520" cy="145800"/>
             </a:xfrm>
             <a:prstGeom prst="borderCallout2">
               <a:avLst>
@@ -7162,7 +7162,7 @@
         <p:spPr>
           <a:xfrm>
             <a:off x="8267760" y="2340000"/>
-            <a:ext cx="2891880" cy="581400"/>
+            <a:ext cx="2891160" cy="580680"/>
           </a:xfrm>
           <a:prstGeom prst="borderCallout2">
             <a:avLst>
@@ -7284,7 +7284,7 @@
         <p:spPr>
           <a:xfrm>
             <a:off x="5040000" y="3507480"/>
-            <a:ext cx="984240" cy="146520"/>
+            <a:ext cx="983520" cy="145800"/>
           </a:xfrm>
           <a:prstGeom prst="borderCallout2">
             <a:avLst>
@@ -7381,7 +7381,7 @@
         <p:spPr>
           <a:xfrm>
             <a:off x="5760000" y="2379600"/>
-            <a:ext cx="984240" cy="320040"/>
+            <a:ext cx="983520" cy="319320"/>
           </a:xfrm>
           <a:prstGeom prst="borderCallout2">
             <a:avLst>
@@ -7515,7 +7515,7 @@
         <p:spPr>
           <a:xfrm>
             <a:off x="2557800" y="3507480"/>
-            <a:ext cx="4649040" cy="272520"/>
+            <a:ext cx="4648320" cy="272520"/>
           </a:xfrm>
           <a:prstGeom prst="rect">
             <a:avLst/>
@@ -7631,9 +7631,9 @@
         <p:grpSpPr>
           <a:xfrm>
             <a:off x="6705000" y="3600000"/>
-            <a:ext cx="1574640" cy="1028160"/>
+            <a:ext cx="1573920" cy="1027440"/>
             <a:chOff x="6705000" y="3600000"/>
-            <a:chExt cx="1574640" cy="1028160"/>
+            <a:chExt cx="1573920" cy="1027440"/>
           </a:xfrm>
         </p:grpSpPr>
         <p:sp>
@@ -7645,7 +7645,7 @@
           <p:spPr>
             <a:xfrm>
               <a:off x="7152120" y="3600000"/>
-              <a:ext cx="1127520" cy="901800"/>
+              <a:ext cx="1126800" cy="901080"/>
             </a:xfrm>
             <a:prstGeom prst="rect">
               <a:avLst/>
@@ -7700,7 +7700,7 @@
           <p:spPr>
             <a:xfrm>
               <a:off x="7318080" y="4371480"/>
-              <a:ext cx="893520" cy="256680"/>
+              <a:ext cx="892800" cy="255960"/>
             </a:xfrm>
             <a:prstGeom prst="rect">
               <a:avLst/>
@@ -7766,7 +7766,7 @@
           <p:spPr>
             <a:xfrm>
               <a:off x="6705000" y="3767400"/>
-              <a:ext cx="893520" cy="568800"/>
+              <a:ext cx="892800" cy="568080"/>
             </a:xfrm>
             <a:prstGeom prst="rect">
               <a:avLst/>
@@ -7896,7 +7896,7 @@
         <p:spPr>
           <a:xfrm>
             <a:off x="6275160" y="3646440"/>
-            <a:ext cx="745560" cy="720"/>
+            <a:ext cx="746280" cy="1440"/>
           </a:xfrm>
           <a:prstGeom prst="straightConnector1">
             <a:avLst/>
@@ -7919,7 +7919,7 @@
         <p:spPr>
           <a:xfrm>
             <a:off x="2550600" y="4047480"/>
-            <a:ext cx="4649040" cy="272520"/>
+            <a:ext cx="4648320" cy="272520"/>
           </a:xfrm>
           <a:prstGeom prst="rect">
             <a:avLst/>
@@ -8035,7 +8035,7 @@
         <p:spPr>
           <a:xfrm>
             <a:off x="2557080" y="4407480"/>
-            <a:ext cx="4649040" cy="272520"/>
+            <a:ext cx="4648320" cy="272520"/>
           </a:xfrm>
           <a:prstGeom prst="rect">
             <a:avLst/>
@@ -8139,7 +8139,7 @@
         <p:spPr>
           <a:xfrm>
             <a:off x="2550600" y="4796280"/>
-            <a:ext cx="4649040" cy="272520"/>
+            <a:ext cx="4648320" cy="272520"/>
           </a:xfrm>
           <a:prstGeom prst="rect">
             <a:avLst/>
@@ -8231,7 +8231,7 @@
         <p:spPr>
           <a:xfrm>
             <a:off x="2557080" y="5127480"/>
-            <a:ext cx="4649040" cy="272520"/>
+            <a:ext cx="4648320" cy="272520"/>
           </a:xfrm>
           <a:prstGeom prst="rect">
             <a:avLst/>
@@ -8347,7 +8347,7 @@
         <p:spPr>
           <a:xfrm>
             <a:off x="2550600" y="5580000"/>
-            <a:ext cx="4649040" cy="272520"/>
+            <a:ext cx="4648320" cy="272520"/>
           </a:xfrm>
           <a:prstGeom prst="rect">
             <a:avLst/>
@@ -8415,7 +8415,7 @@
         <p:spPr>
           <a:xfrm>
             <a:off x="2557080" y="5940000"/>
-            <a:ext cx="4649040" cy="272520"/>
+            <a:ext cx="4648320" cy="272520"/>
           </a:xfrm>
           <a:prstGeom prst="rect">
             <a:avLst/>
@@ -8483,7 +8483,7 @@
         <p:spPr>
           <a:xfrm>
             <a:off x="720000" y="1080000"/>
-            <a:ext cx="1063080" cy="276120"/>
+            <a:ext cx="1062360" cy="275400"/>
           </a:xfrm>
           <a:prstGeom prst="roundRect">
             <a:avLst>
@@ -8540,7 +8540,7 @@
         <p:spPr>
           <a:xfrm>
             <a:off x="736560" y="1839240"/>
-            <a:ext cx="1063080" cy="276120"/>
+            <a:ext cx="1062360" cy="275400"/>
           </a:xfrm>
           <a:prstGeom prst="roundRect">
             <a:avLst>
@@ -8597,7 +8597,7 @@
         <p:spPr>
           <a:xfrm>
             <a:off x="736560" y="3420000"/>
-            <a:ext cx="1063080" cy="359640"/>
+            <a:ext cx="1062360" cy="358920"/>
           </a:xfrm>
           <a:prstGeom prst="roundRect">
             <a:avLst>
@@ -8654,7 +8654,7 @@
         <p:spPr>
           <a:xfrm>
             <a:off x="718920" y="4047840"/>
-            <a:ext cx="1063080" cy="271800"/>
+            <a:ext cx="1062360" cy="271080"/>
           </a:xfrm>
           <a:prstGeom prst="roundRect">
             <a:avLst>
@@ -8711,7 +8711,7 @@
         <p:spPr>
           <a:xfrm>
             <a:off x="723600" y="4407840"/>
-            <a:ext cx="1063080" cy="271800"/>
+            <a:ext cx="1062360" cy="271080"/>
           </a:xfrm>
           <a:prstGeom prst="roundRect">
             <a:avLst>
@@ -8768,7 +8768,7 @@
         <p:spPr>
           <a:xfrm>
             <a:off x="726840" y="4767840"/>
-            <a:ext cx="1063080" cy="271800"/>
+            <a:ext cx="1062360" cy="271080"/>
           </a:xfrm>
           <a:prstGeom prst="roundRect">
             <a:avLst>
@@ -8825,7 +8825,7 @@
         <p:spPr>
           <a:xfrm>
             <a:off x="736560" y="5167800"/>
-            <a:ext cx="1063080" cy="271800"/>
+            <a:ext cx="1062360" cy="271080"/>
           </a:xfrm>
           <a:prstGeom prst="roundRect">
             <a:avLst>
@@ -8882,7 +8882,7 @@
         <p:spPr>
           <a:xfrm>
             <a:off x="736560" y="5545080"/>
-            <a:ext cx="1063080" cy="271800"/>
+            <a:ext cx="1062360" cy="271080"/>
           </a:xfrm>
           <a:prstGeom prst="roundRect">
             <a:avLst>
@@ -8939,7 +8939,7 @@
         <p:spPr>
           <a:xfrm>
             <a:off x="726840" y="5919840"/>
-            <a:ext cx="1063080" cy="271800"/>
+            <a:ext cx="1062360" cy="271080"/>
           </a:xfrm>
           <a:prstGeom prst="roundRect">
             <a:avLst>
@@ -8996,7 +8996,7 @@
         <p:spPr>
           <a:xfrm>
             <a:off x="720000" y="1440000"/>
-            <a:ext cx="1063080" cy="276120"/>
+            <a:ext cx="1062360" cy="275400"/>
           </a:xfrm>
           <a:prstGeom prst="roundRect">
             <a:avLst>
@@ -9052,8 +9052,8 @@
         </p:nvSpPr>
         <p:spPr>
           <a:xfrm rot="21579600">
-            <a:off x="756360" y="2342880"/>
-            <a:ext cx="1043640" cy="356400"/>
+            <a:off x="755640" y="2342880"/>
+            <a:ext cx="1042920" cy="355680"/>
           </a:xfrm>
           <a:prstGeom prst="roundRect">
             <a:avLst>
@@ -9110,7 +9110,7 @@
         <p:spPr>
           <a:xfrm>
             <a:off x="10800000" y="1080000"/>
-            <a:ext cx="899640" cy="5507640"/>
+            <a:ext cx="898920" cy="5506920"/>
           </a:xfrm>
           <a:prstGeom prst="downArrow">
             <a:avLst>
@@ -9162,7 +9162,7 @@
         <p:spPr>
           <a:xfrm>
             <a:off x="736560" y="6300000"/>
-            <a:ext cx="1063080" cy="271800"/>
+            <a:ext cx="1062360" cy="271080"/>
           </a:xfrm>
           <a:prstGeom prst="roundRect">
             <a:avLst>
@@ -9219,7 +9219,7 @@
         <p:spPr>
           <a:xfrm>
             <a:off x="2550600" y="6300000"/>
-            <a:ext cx="4649040" cy="272520"/>
+            <a:ext cx="4648320" cy="272520"/>
           </a:xfrm>
           <a:prstGeom prst="rect">
             <a:avLst/>
@@ -9287,7 +9287,7 @@
         <p:spPr>
           <a:xfrm>
             <a:off x="7547760" y="6258240"/>
-            <a:ext cx="2891880" cy="581400"/>
+            <a:ext cx="2891160" cy="580680"/>
           </a:xfrm>
           <a:prstGeom prst="borderCallout2">
             <a:avLst>
@@ -9395,7 +9395,7 @@
         <p:spPr>
           <a:xfrm>
             <a:off x="6543720" y="3786480"/>
-            <a:ext cx="368640" cy="368640"/>
+            <a:ext cx="367920" cy="367920"/>
           </a:xfrm>
           <a:prstGeom prst="rect">
             <a:avLst/>
@@ -9418,7 +9418,7 @@
         <p:spPr>
           <a:xfrm>
             <a:off x="6565680" y="4558320"/>
-            <a:ext cx="368640" cy="368640"/>
+            <a:ext cx="367920" cy="367920"/>
           </a:xfrm>
           <a:prstGeom prst="rect">
             <a:avLst/>
@@ -9437,7 +9437,7 @@
         <p:spPr>
           <a:xfrm>
             <a:off x="1478160" y="1839240"/>
-            <a:ext cx="3030480" cy="699120"/>
+            <a:ext cx="3029760" cy="699120"/>
           </a:xfrm>
           <a:prstGeom prst="rect">
             <a:avLst/>
@@ -9500,8 +9500,8 @@
         </p:nvSpPr>
         <p:spPr>
           <a:xfrm>
-            <a:off x="360000" y="360000"/>
-            <a:ext cx="11508480" cy="6299640"/>
+            <a:off x="360000" y="180720"/>
+            <a:ext cx="11507760" cy="6298920"/>
           </a:xfrm>
           <a:prstGeom prst="rect">
             <a:avLst/>
@@ -9562,7 +9562,7 @@
         <p:spPr>
           <a:xfrm>
             <a:off x="671760" y="848160"/>
-            <a:ext cx="10969920" cy="720"/>
+            <a:ext cx="10970640" cy="1440"/>
           </a:xfrm>
           <a:prstGeom prst="straightConnector1">
             <a:avLst/>
@@ -9584,7 +9584,7 @@
         <p:spPr>
           <a:xfrm>
             <a:off x="621360" y="810000"/>
-            <a:ext cx="1863720" cy="87840"/>
+            <a:ext cx="1863000" cy="87120"/>
           </a:xfrm>
           <a:prstGeom prst="rect">
             <a:avLst/>
@@ -9634,7 +9634,7 @@
         <p:spPr>
           <a:xfrm>
             <a:off x="569160" y="471240"/>
-            <a:ext cx="1488600" cy="363600"/>
+            <a:ext cx="1487880" cy="363600"/>
           </a:xfrm>
           <a:prstGeom prst="rect">
             <a:avLst/>
@@ -9692,7 +9692,7 @@
         <p:spPr>
           <a:xfrm>
             <a:off x="866520" y="430920"/>
-            <a:ext cx="3273120" cy="363600"/>
+            <a:ext cx="3272400" cy="363600"/>
           </a:xfrm>
           <a:prstGeom prst="rect">
             <a:avLst/>
@@ -9796,7 +9796,7 @@
         <p:spPr>
           <a:xfrm>
             <a:off x="619560" y="1080000"/>
-            <a:ext cx="10720080" cy="3747240"/>
+            <a:ext cx="10719360" cy="4021560"/>
           </a:xfrm>
           <a:prstGeom prst="rect">
             <a:avLst/>
@@ -9883,6 +9883,108 @@
                 <a:latin typeface="Noto Sans KR"/>
                 <a:ea typeface="Noto Sans KR"/>
               </a:rPr>
+              <a:t>      </a:t>
+            </a:r>
+            <a:r>
+              <a:rPr b="0" lang="ko-KR" sz="1200" spc="-1" strike="noStrike">
+                <a:solidFill>
+                  <a:schemeClr val="dk1"/>
+                </a:solidFill>
+                <a:latin typeface="Noto Sans KR"/>
+                <a:ea typeface="Noto Sans KR"/>
+              </a:rPr>
+              <a:t>쿠폰 관리 </a:t>
+            </a:r>
+            <a:endParaRPr b="0" lang="en-US" sz="1200" spc="-1" strike="noStrike">
+              <a:solidFill>
+                <a:srgbClr val="000000"/>
+              </a:solidFill>
+              <a:latin typeface="Noto Sans KR"/>
+            </a:endParaRPr>
+          </a:p>
+          <a:p>
+            <a:pPr defTabSz="914400">
+              <a:lnSpc>
+                <a:spcPct val="100000"/>
+              </a:lnSpc>
+            </a:pPr>
+            <a:r>
+              <a:rPr b="0" lang="en-US" sz="1200" spc="-1" strike="noStrike">
+                <a:solidFill>
+                  <a:schemeClr val="dk1"/>
+                </a:solidFill>
+                <a:latin typeface="Noto Sans KR"/>
+                <a:ea typeface="Noto Sans KR"/>
+              </a:rPr>
+              <a:t> </a:t>
+            </a:r>
+            <a:endParaRPr b="0" lang="en-US" sz="1200" spc="-1" strike="noStrike">
+              <a:solidFill>
+                <a:srgbClr val="000000"/>
+              </a:solidFill>
+              <a:latin typeface="Noto Sans KR"/>
+            </a:endParaRPr>
+          </a:p>
+          <a:p>
+            <a:pPr defTabSz="914400">
+              <a:lnSpc>
+                <a:spcPct val="100000"/>
+              </a:lnSpc>
+            </a:pPr>
+            <a:r>
+              <a:rPr b="0" lang="en-US" sz="1200" spc="-1" strike="noStrike">
+                <a:solidFill>
+                  <a:schemeClr val="dk1"/>
+                </a:solidFill>
+                <a:latin typeface="Noto Sans KR"/>
+                <a:ea typeface="Noto Sans KR"/>
+              </a:rPr>
+              <a:t> </a:t>
+            </a:r>
+            <a:endParaRPr b="0" lang="en-US" sz="1200" spc="-1" strike="noStrike">
+              <a:solidFill>
+                <a:srgbClr val="000000"/>
+              </a:solidFill>
+              <a:latin typeface="Noto Sans KR"/>
+            </a:endParaRPr>
+          </a:p>
+          <a:p>
+            <a:pPr defTabSz="914400">
+              <a:lnSpc>
+                <a:spcPct val="100000"/>
+              </a:lnSpc>
+            </a:pPr>
+            <a:r>
+              <a:rPr b="0" lang="en-US" sz="1200" spc="-1" strike="noStrike">
+                <a:solidFill>
+                  <a:schemeClr val="dk1"/>
+                </a:solidFill>
+                <a:latin typeface="Noto Sans KR"/>
+                <a:ea typeface="Noto Sans KR"/>
+              </a:rPr>
+              <a:t>                 </a:t>
+            </a:r>
+            <a:endParaRPr b="0" lang="en-US" sz="1200" spc="-1" strike="noStrike">
+              <a:solidFill>
+                <a:srgbClr val="000000"/>
+              </a:solidFill>
+              <a:latin typeface="Noto Sans KR"/>
+            </a:endParaRPr>
+          </a:p>
+          <a:p>
+            <a:pPr defTabSz="914400">
+              <a:lnSpc>
+                <a:spcPct val="100000"/>
+              </a:lnSpc>
+            </a:pPr>
+            <a:r>
+              <a:rPr b="0" lang="en-US" sz="1200" spc="-1" strike="noStrike">
+                <a:solidFill>
+                  <a:schemeClr val="dk1"/>
+                </a:solidFill>
+                <a:latin typeface="Noto Sans KR"/>
+                <a:ea typeface="Noto Sans KR"/>
+              </a:rPr>
               <a:t>  </a:t>
             </a:r>
             <a:endParaRPr b="0" lang="en-US" sz="1200" spc="-1" strike="noStrike">
@@ -9906,6 +10008,75 @@
                 <a:latin typeface="Noto Sans KR"/>
                 <a:ea typeface="Noto Sans KR"/>
               </a:rPr>
+              <a:t>     </a:t>
+            </a:r>
+            <a:endParaRPr b="0" lang="en-US" sz="1200" spc="-1" strike="noStrike">
+              <a:solidFill>
+                <a:srgbClr val="000000"/>
+              </a:solidFill>
+              <a:latin typeface="Noto Sans KR"/>
+            </a:endParaRPr>
+          </a:p>
+          <a:p>
+            <a:pPr defTabSz="914400">
+              <a:lnSpc>
+                <a:spcPct val="100000"/>
+              </a:lnSpc>
+            </a:pPr>
+            <a:r>
+              <a:rPr b="0" lang="en-US" sz="1200" spc="-1" strike="noStrike">
+                <a:solidFill>
+                  <a:schemeClr val="dk1"/>
+                </a:solidFill>
+                <a:latin typeface="Noto Sans KR"/>
+                <a:ea typeface="Noto Sans KR"/>
+              </a:rPr>
+              <a:t>                    </a:t>
+            </a:r>
+            <a:endParaRPr b="0" lang="en-US" sz="1200" spc="-1" strike="noStrike">
+              <a:solidFill>
+                <a:srgbClr val="000000"/>
+              </a:solidFill>
+              <a:latin typeface="Noto Sans KR"/>
+            </a:endParaRPr>
+          </a:p>
+          <a:p>
+            <a:pPr defTabSz="914400">
+              <a:lnSpc>
+                <a:spcPct val="100000"/>
+              </a:lnSpc>
+            </a:pPr>
+            <a:r>
+              <a:rPr b="0" lang="en-US" sz="1200" spc="-1" strike="noStrike">
+                <a:solidFill>
+                  <a:schemeClr val="dk1"/>
+                </a:solidFill>
+                <a:latin typeface="Noto Sans KR"/>
+                <a:ea typeface="Noto Sans KR"/>
+              </a:rPr>
+              <a:t>                </a:t>
+            </a:r>
+            <a:endParaRPr b="0" lang="en-US" sz="1200" spc="-1" strike="noStrike">
+              <a:solidFill>
+                <a:srgbClr val="000000"/>
+              </a:solidFill>
+              <a:latin typeface="Noto Sans KR"/>
+            </a:endParaRPr>
+          </a:p>
+          <a:p>
+            <a:pPr defTabSz="914400">
+              <a:lnSpc>
+                <a:spcPct val="100000"/>
+              </a:lnSpc>
+            </a:pPr>
+            <a:r>
+              <a:rPr b="0" lang="en-US" sz="1200" spc="-1" strike="noStrike">
+                <a:solidFill>
+                  <a:schemeClr val="dk1"/>
+                </a:solidFill>
+                <a:latin typeface="Noto Sans KR"/>
+                <a:ea typeface="Noto Sans KR"/>
+              </a:rPr>
               <a:t> </a:t>
             </a:r>
             <a:endParaRPr b="0" lang="en-US" sz="1200" spc="-1" strike="noStrike">
@@ -9929,18 +10100,80 @@
                 <a:latin typeface="Noto Sans KR"/>
                 <a:ea typeface="Noto Sans KR"/>
               </a:rPr>
+              <a:t>       </a:t>
+            </a:r>
+            <a:endParaRPr b="0" lang="en-US" sz="1200" spc="-1" strike="noStrike">
+              <a:solidFill>
+                <a:srgbClr val="000000"/>
+              </a:solidFill>
+              <a:latin typeface="Noto Sans KR"/>
+            </a:endParaRPr>
+          </a:p>
+          <a:p>
+            <a:pPr defTabSz="914400">
+              <a:lnSpc>
+                <a:spcPct val="100000"/>
+              </a:lnSpc>
+            </a:pPr>
+            <a:r>
+              <a:rPr b="0" lang="en-US" sz="1200" spc="-1" strike="noStrike">
+                <a:solidFill>
+                  <a:schemeClr val="dk1"/>
+                </a:solidFill>
+                <a:latin typeface="Noto Sans KR"/>
+                <a:ea typeface="Noto Sans KR"/>
+              </a:rPr>
               <a:t>      </a:t>
             </a:r>
-            <a:r>
-              <a:rPr b="0" lang="ko-KR" sz="1050" spc="-1" strike="noStrike">
+            <a:endParaRPr b="0" lang="en-US" sz="1200" spc="-1" strike="noStrike">
+              <a:solidFill>
+                <a:srgbClr val="000000"/>
+              </a:solidFill>
+              <a:latin typeface="Noto Sans KR"/>
+            </a:endParaRPr>
+          </a:p>
+          <a:p>
+            <a:pPr defTabSz="914400">
+              <a:lnSpc>
+                <a:spcPct val="100000"/>
+              </a:lnSpc>
+            </a:pPr>
+            <a:endParaRPr b="0" lang="en-US" sz="1200" spc="-1" strike="noStrike">
+              <a:solidFill>
+                <a:srgbClr val="000000"/>
+              </a:solidFill>
+              <a:latin typeface="Noto Sans KR"/>
+            </a:endParaRPr>
+          </a:p>
+          <a:p>
+            <a:pPr defTabSz="914400">
+              <a:lnSpc>
+                <a:spcPct val="100000"/>
+              </a:lnSpc>
+            </a:pPr>
+            <a:r>
+              <a:rPr b="0" lang="en-US" sz="1200" spc="-1" strike="noStrike">
                 <a:solidFill>
                   <a:schemeClr val="dk1"/>
                 </a:solidFill>
                 <a:latin typeface="Noto Sans KR"/>
                 <a:ea typeface="Noto Sans KR"/>
               </a:rPr>
-              <a:t>쿠폰 관리</a:t>
-            </a:r>
+              <a:t>    </a:t>
+            </a:r>
+            <a:endParaRPr b="0" lang="en-US" sz="1200" spc="-1" strike="noStrike">
+              <a:solidFill>
+                <a:srgbClr val="000000"/>
+              </a:solidFill>
+              <a:latin typeface="Noto Sans KR"/>
+            </a:endParaRPr>
+          </a:p>
+          <a:p>
+            <a:pPr defTabSz="914400">
+              <a:lnSpc>
+                <a:spcPct val="100000"/>
+              </a:lnSpc>
+            </a:pPr>
             <a:r>
               <a:rPr b="0" lang="en-US" sz="1200" spc="-1" strike="noStrike">
                 <a:solidFill>
@@ -9949,7 +10182,7 @@
                 <a:latin typeface="Noto Sans KR"/>
                 <a:ea typeface="Noto Sans KR"/>
               </a:rPr>
-              <a:t>            </a:t>
+              <a:t>         </a:t>
             </a:r>
             <a:endParaRPr b="0" lang="en-US" sz="1200" spc="-1" strike="noStrike">
               <a:solidFill>
@@ -9972,7 +10205,7 @@
                 <a:latin typeface="Noto Sans KR"/>
                 <a:ea typeface="Noto Sans KR"/>
               </a:rPr>
-              <a:t>  </a:t>
+              <a:t>          </a:t>
             </a:r>
             <a:endParaRPr b="0" lang="en-US" sz="1200" spc="-1" strike="noStrike">
               <a:solidFill>
@@ -9987,267 +10220,7 @@
                 <a:spcPct val="100000"/>
               </a:lnSpc>
             </a:pPr>
-            <a:r>
-              <a:rPr b="0" lang="en-US" sz="1200" spc="-1" strike="noStrike">
-                <a:solidFill>
-                  <a:schemeClr val="dk1"/>
-                </a:solidFill>
-                <a:latin typeface="Noto Sans KR"/>
-                <a:ea typeface="Noto Sans KR"/>
-              </a:rPr>
-              <a:t>     </a:t>
-            </a:r>
-            <a:endParaRPr b="0" lang="en-US" sz="1200" spc="-1" strike="noStrike">
-              <a:solidFill>
-                <a:srgbClr val="000000"/>
-              </a:solidFill>
-              <a:latin typeface="Noto Sans KR"/>
-            </a:endParaRPr>
-          </a:p>
-          <a:p>
-            <a:pPr defTabSz="914400">
-              <a:lnSpc>
-                <a:spcPct val="100000"/>
-              </a:lnSpc>
-            </a:pPr>
-            <a:r>
-              <a:rPr b="0" lang="en-US" sz="1200" spc="-1" strike="noStrike">
-                <a:solidFill>
-                  <a:schemeClr val="dk1"/>
-                </a:solidFill>
-                <a:latin typeface="Noto Sans KR"/>
-                <a:ea typeface="Noto Sans KR"/>
-              </a:rPr>
-              <a:t>                    </a:t>
-            </a:r>
-            <a:endParaRPr b="0" lang="en-US" sz="1200" spc="-1" strike="noStrike">
-              <a:solidFill>
-                <a:srgbClr val="000000"/>
-              </a:solidFill>
-              <a:latin typeface="Noto Sans KR"/>
-            </a:endParaRPr>
-          </a:p>
-          <a:p>
-            <a:pPr defTabSz="914400">
-              <a:lnSpc>
-                <a:spcPct val="100000"/>
-              </a:lnSpc>
-            </a:pPr>
-            <a:r>
-              <a:rPr b="0" lang="en-US" sz="1200" spc="-1" strike="noStrike">
-                <a:solidFill>
-                  <a:schemeClr val="dk1"/>
-                </a:solidFill>
-                <a:latin typeface="Noto Sans KR"/>
-                <a:ea typeface="Noto Sans KR"/>
-              </a:rPr>
-              <a:t>                </a:t>
-            </a:r>
-            <a:endParaRPr b="0" lang="en-US" sz="1200" spc="-1" strike="noStrike">
-              <a:solidFill>
-                <a:srgbClr val="000000"/>
-              </a:solidFill>
-              <a:latin typeface="Noto Sans KR"/>
-            </a:endParaRPr>
-          </a:p>
-          <a:p>
-            <a:pPr defTabSz="914400">
-              <a:lnSpc>
-                <a:spcPct val="100000"/>
-              </a:lnSpc>
-            </a:pPr>
-            <a:r>
-              <a:rPr b="0" lang="en-US" sz="1200" spc="-1" strike="noStrike">
-                <a:solidFill>
-                  <a:schemeClr val="dk1"/>
-                </a:solidFill>
-                <a:latin typeface="Noto Sans KR"/>
-                <a:ea typeface="Noto Sans KR"/>
-              </a:rPr>
-              <a:t>  </a:t>
-            </a:r>
-            <a:r>
-              <a:rPr b="0" lang="ko-KR" sz="1200" spc="-1" strike="noStrike">
-                <a:solidFill>
-                  <a:schemeClr val="dk1"/>
-                </a:solidFill>
-                <a:latin typeface="Noto Sans KR"/>
-                <a:ea typeface="Noto Sans KR"/>
-              </a:rPr>
-              <a:t>적립 내역 조회</a:t>
-            </a:r>
-            <a:endParaRPr b="0" lang="en-US" sz="1200" spc="-1" strike="noStrike">
-              <a:solidFill>
-                <a:srgbClr val="000000"/>
-              </a:solidFill>
-              <a:latin typeface="Noto Sans KR"/>
-            </a:endParaRPr>
-          </a:p>
-          <a:p>
-            <a:pPr defTabSz="914400">
-              <a:lnSpc>
-                <a:spcPct val="100000"/>
-              </a:lnSpc>
-            </a:pPr>
-            <a:r>
-              <a:rPr b="0" lang="en-US" sz="1200" spc="-1" strike="noStrike">
-                <a:solidFill>
-                  <a:schemeClr val="dk1"/>
-                </a:solidFill>
-                <a:latin typeface="Noto Sans KR"/>
-                <a:ea typeface="Noto Sans KR"/>
-              </a:rPr>
-              <a:t>       </a:t>
-            </a:r>
-            <a:endParaRPr b="0" lang="en-US" sz="1200" spc="-1" strike="noStrike">
-              <a:solidFill>
-                <a:srgbClr val="000000"/>
-              </a:solidFill>
-              <a:latin typeface="Noto Sans KR"/>
-            </a:endParaRPr>
-          </a:p>
-          <a:p>
-            <a:pPr defTabSz="914400">
-              <a:lnSpc>
-                <a:spcPct val="100000"/>
-              </a:lnSpc>
-            </a:pPr>
-            <a:r>
-              <a:rPr b="0" lang="en-US" sz="1200" spc="-1" strike="noStrike">
-                <a:solidFill>
-                  <a:schemeClr val="dk1"/>
-                </a:solidFill>
-                <a:latin typeface="Noto Sans KR"/>
-                <a:ea typeface="Noto Sans KR"/>
-              </a:rPr>
-              <a:t>      </a:t>
-            </a:r>
-            <a:endParaRPr b="0" lang="en-US" sz="1200" spc="-1" strike="noStrike">
-              <a:solidFill>
-                <a:srgbClr val="000000"/>
-              </a:solidFill>
-              <a:latin typeface="Noto Sans KR"/>
-            </a:endParaRPr>
-          </a:p>
-          <a:p>
-            <a:pPr defTabSz="914400">
-              <a:lnSpc>
-                <a:spcPct val="100000"/>
-              </a:lnSpc>
-            </a:pPr>
-            <a:endParaRPr b="0" lang="en-US" sz="1200" spc="-1" strike="noStrike">
-              <a:solidFill>
-                <a:srgbClr val="000000"/>
-              </a:solidFill>
-              <a:latin typeface="Noto Sans KR"/>
-            </a:endParaRPr>
-          </a:p>
-          <a:p>
-            <a:pPr defTabSz="914400">
-              <a:lnSpc>
-                <a:spcPct val="100000"/>
-              </a:lnSpc>
-            </a:pPr>
-            <a:r>
-              <a:rPr b="0" lang="en-US" sz="1200" spc="-1" strike="noStrike">
-                <a:solidFill>
-                  <a:schemeClr val="dk1"/>
-                </a:solidFill>
-                <a:latin typeface="Noto Sans KR"/>
-                <a:ea typeface="Noto Sans KR"/>
-              </a:rPr>
-              <a:t>  </a:t>
-            </a:r>
-            <a:r>
-              <a:rPr b="0" lang="ko-KR" sz="1200" spc="-1" strike="noStrike">
-                <a:solidFill>
-                  <a:schemeClr val="dk1"/>
-                </a:solidFill>
-                <a:latin typeface="Noto Sans KR"/>
-                <a:ea typeface="Noto Sans KR"/>
-              </a:rPr>
-              <a:t>회원 정보 조회    </a:t>
-            </a:r>
-            <a:endParaRPr b="0" lang="en-US" sz="1200" spc="-1" strike="noStrike">
-              <a:solidFill>
-                <a:srgbClr val="000000"/>
-              </a:solidFill>
-              <a:latin typeface="Noto Sans KR"/>
-            </a:endParaRPr>
-          </a:p>
-          <a:p>
-            <a:pPr defTabSz="914400">
-              <a:lnSpc>
-                <a:spcPct val="100000"/>
-              </a:lnSpc>
-            </a:pPr>
-            <a:r>
-              <a:rPr b="0" lang="en-US" sz="1200" spc="-1" strike="noStrike">
-                <a:solidFill>
-                  <a:schemeClr val="dk1"/>
-                </a:solidFill>
-                <a:latin typeface="Noto Sans KR"/>
-                <a:ea typeface="Noto Sans KR"/>
-              </a:rPr>
-              <a:t>         </a:t>
-            </a:r>
-            <a:endParaRPr b="0" lang="en-US" sz="1200" spc="-1" strike="noStrike">
-              <a:solidFill>
-                <a:srgbClr val="000000"/>
-              </a:solidFill>
-              <a:latin typeface="Noto Sans KR"/>
-            </a:endParaRPr>
-          </a:p>
-          <a:p>
-            <a:pPr defTabSz="914400">
-              <a:lnSpc>
-                <a:spcPct val="100000"/>
-              </a:lnSpc>
-            </a:pPr>
-            <a:r>
-              <a:rPr b="0" lang="en-US" sz="1200" spc="-1" strike="noStrike">
-                <a:solidFill>
-                  <a:schemeClr val="dk1"/>
-                </a:solidFill>
-                <a:latin typeface="Noto Sans KR"/>
-                <a:ea typeface="Noto Sans KR"/>
-              </a:rPr>
-              <a:t>          </a:t>
-            </a:r>
-            <a:endParaRPr b="0" lang="en-US" sz="1200" spc="-1" strike="noStrike">
-              <a:solidFill>
-                <a:srgbClr val="000000"/>
-              </a:solidFill>
-              <a:latin typeface="Noto Sans KR"/>
-            </a:endParaRPr>
-          </a:p>
-          <a:p>
-            <a:pPr defTabSz="914400">
-              <a:lnSpc>
-                <a:spcPct val="100000"/>
-              </a:lnSpc>
-            </a:pPr>
-            <a:r>
-              <a:rPr b="0" lang="en-US" sz="1200" spc="-1" strike="noStrike">
-                <a:solidFill>
-                  <a:schemeClr val="dk1"/>
-                </a:solidFill>
-                <a:latin typeface="Noto Sans KR"/>
-                <a:ea typeface="Noto Sans KR"/>
-              </a:rPr>
-              <a:t>  </a:t>
-            </a:r>
-            <a:r>
-              <a:rPr b="1" lang="ko-KR" sz="900" spc="-1" strike="noStrike">
-                <a:solidFill>
-                  <a:schemeClr val="dk1"/>
-                </a:solidFill>
-                <a:latin typeface="Noto Sans KR"/>
-                <a:ea typeface="Noto Sans KR"/>
-              </a:rPr>
-              <a:t>회원 전용 혜택 안내</a:t>
-            </a:r>
-            <a:endParaRPr b="0" lang="en-US" sz="900" spc="-1" strike="noStrike">
+            <a:endParaRPr b="0" lang="en-US" sz="1800" spc="-1" strike="noStrike">
               <a:solidFill>
                 <a:srgbClr val="000000"/>
               </a:solidFill>
@@ -10323,8 +10296,8 @@
         </p:nvSpPr>
         <p:spPr>
           <a:xfrm>
-            <a:off x="2581560" y="1089000"/>
-            <a:ext cx="4649040" cy="272520"/>
+            <a:off x="2551320" y="1089000"/>
+            <a:ext cx="4648320" cy="272520"/>
           </a:xfrm>
           <a:prstGeom prst="rect">
             <a:avLst/>
@@ -10391,8 +10364,8 @@
         </p:nvSpPr>
         <p:spPr>
           <a:xfrm>
-            <a:off x="2587680" y="1800000"/>
-            <a:ext cx="4649040" cy="272520"/>
+            <a:off x="2551320" y="1440000"/>
+            <a:ext cx="4648320" cy="272520"/>
           </a:xfrm>
           <a:prstGeom prst="rect">
             <a:avLst/>
@@ -10459,8 +10432,8 @@
         </p:nvSpPr>
         <p:spPr>
           <a:xfrm>
-            <a:off x="2557800" y="2700000"/>
-            <a:ext cx="4649040" cy="272520"/>
+            <a:off x="2557800" y="1839240"/>
+            <a:ext cx="4648320" cy="272520"/>
           </a:xfrm>
           <a:prstGeom prst="rect">
             <a:avLst/>
@@ -10527,8 +10500,8 @@
         </p:nvSpPr>
         <p:spPr>
           <a:xfrm>
-            <a:off x="2557080" y="3420000"/>
-            <a:ext cx="4649040" cy="272520"/>
+            <a:off x="2557080" y="2428200"/>
+            <a:ext cx="4648320" cy="272520"/>
           </a:xfrm>
           <a:prstGeom prst="rect">
             <a:avLst/>
@@ -10595,8 +10568,8 @@
         </p:nvSpPr>
         <p:spPr>
           <a:xfrm>
-            <a:off x="2557080" y="4108320"/>
-            <a:ext cx="4649040" cy="272520"/>
+            <a:off x="2557080" y="2880000"/>
+            <a:ext cx="4648320" cy="272520"/>
           </a:xfrm>
           <a:prstGeom prst="rect">
             <a:avLst/>
@@ -10664,7 +10637,7 @@
         <p:spPr>
           <a:xfrm>
             <a:off x="720000" y="1089000"/>
-            <a:ext cx="1063080" cy="276120"/>
+            <a:ext cx="1062360" cy="275400"/>
           </a:xfrm>
           <a:prstGeom prst="roundRect">
             <a:avLst>
@@ -10714,14 +10687,14 @@
       </p:sp>
       <p:sp>
         <p:nvSpPr>
-          <p:cNvPr id="111" name="모서리가 둥근 직사각형 53"/>
+          <p:cNvPr id="111" name="모서리가 둥근 직사각형 54"/>
           <p:cNvSpPr/>
           <p:nvPr/>
         </p:nvSpPr>
         <p:spPr>
           <a:xfrm>
-            <a:off x="720000" y="3420000"/>
-            <a:ext cx="1079640" cy="359640"/>
+            <a:off x="720000" y="2340720"/>
+            <a:ext cx="1078920" cy="358920"/>
           </a:xfrm>
           <a:prstGeom prst="roundRect">
             <a:avLst>
@@ -10771,14 +10744,14 @@
       </p:sp>
       <p:sp>
         <p:nvSpPr>
-          <p:cNvPr id="112" name="모서리가 둥근 직사각형 54"/>
+          <p:cNvPr id="112" name="모서리가 둥근 직사각형 1"/>
           <p:cNvSpPr/>
           <p:nvPr/>
         </p:nvSpPr>
         <p:spPr>
           <a:xfrm>
-            <a:off x="720000" y="4038480"/>
-            <a:ext cx="1079640" cy="359640"/>
+            <a:off x="736560" y="1468080"/>
+            <a:ext cx="1062360" cy="314640"/>
           </a:xfrm>
           <a:prstGeom prst="roundRect">
             <a:avLst>
@@ -10812,7 +10785,7 @@
             <a:noAutofit/>
           </a:bodyPr>
           <a:p>
-            <a:pPr algn="ctr" defTabSz="914400">
+            <a:pPr>
               <a:lnSpc>
                 <a:spcPct val="100000"/>
               </a:lnSpc>
@@ -10828,14 +10801,14 @@
       </p:sp>
       <p:sp>
         <p:nvSpPr>
-          <p:cNvPr id="113" name="모서리가 둥근 직사각형 1"/>
+          <p:cNvPr id="113" name="모서리가 둥근 직사각형 2"/>
           <p:cNvSpPr/>
           <p:nvPr/>
         </p:nvSpPr>
         <p:spPr>
-          <a:xfrm>
-            <a:off x="736560" y="1800000"/>
-            <a:ext cx="1063080" cy="315360"/>
+          <a:xfrm rot="21579600">
+            <a:off x="719640" y="1875240"/>
+            <a:ext cx="1079280" cy="319680"/>
           </a:xfrm>
           <a:prstGeom prst="roundRect">
             <a:avLst>
@@ -10885,14 +10858,314 @@
       </p:sp>
       <p:sp>
         <p:nvSpPr>
-          <p:cNvPr id="114" name="모서리가 둥근 직사각형 2"/>
+          <p:cNvPr id="114" name=""/>
           <p:cNvSpPr/>
           <p:nvPr/>
         </p:nvSpPr>
         <p:spPr>
-          <a:xfrm rot="21579600">
-            <a:off x="720360" y="2700000"/>
-            <a:ext cx="1080000" cy="320400"/>
+          <a:xfrm>
+            <a:off x="10312920" y="1080000"/>
+            <a:ext cx="581400" cy="1980000"/>
+          </a:xfrm>
+          <a:prstGeom prst="downArrow">
+            <a:avLst>
+              <a:gd name="adj1" fmla="val 50000"/>
+              <a:gd name="adj2" fmla="val 153000"/>
+            </a:avLst>
+          </a:prstGeom>
+          <a:solidFill>
+            <a:srgbClr val="1c1c1c"/>
+          </a:solidFill>
+          <a:ln w="12600">
+            <a:solidFill>
+              <a:srgbClr val="111111"/>
+            </a:solidFill>
+            <a:round/>
+          </a:ln>
+        </p:spPr>
+        <p:style>
+          <a:lnRef idx="0"/>
+          <a:fillRef idx="0"/>
+          <a:effectRef idx="0"/>
+          <a:fontRef idx="minor"/>
+        </p:style>
+        <p:txBody>
+          <a:bodyPr lIns="96120" rIns="96120" tIns="51120" bIns="51120" anchor="ctr">
+            <a:noAutofit/>
+          </a:bodyPr>
+          <a:p>
+            <a:pPr>
+              <a:lnSpc>
+                <a:spcPct val="100000"/>
+              </a:lnSpc>
+            </a:pPr>
+            <a:endParaRPr b="0" lang="en-US" sz="1800" spc="-1" strike="noStrike">
+              <a:solidFill>
+                <a:srgbClr val="ffffff"/>
+              </a:solidFill>
+              <a:latin typeface="Noto Sans KR"/>
+            </a:endParaRPr>
+          </a:p>
+        </p:txBody>
+      </p:sp>
+      <p:sp>
+        <p:nvSpPr>
+          <p:cNvPr id="115" name=""/>
+          <p:cNvSpPr/>
+          <p:nvPr/>
+        </p:nvSpPr>
+        <p:spPr>
+          <a:xfrm>
+            <a:off x="651240" y="1890720"/>
+            <a:ext cx="1260360" cy="272880"/>
+          </a:xfrm>
+          <a:prstGeom prst="rect">
+            <a:avLst/>
+          </a:prstGeom>
+          <a:noFill/>
+          <a:ln w="0">
+            <a:noFill/>
+          </a:ln>
+        </p:spPr>
+        <p:style>
+          <a:lnRef idx="0"/>
+          <a:fillRef idx="0"/>
+          <a:effectRef idx="0"/>
+          <a:fontRef idx="minor"/>
+        </p:style>
+        <p:txBody>
+          <a:bodyPr lIns="90000" rIns="90000" tIns="45000" bIns="45000" anchor="t">
+            <a:noAutofit/>
+          </a:bodyPr>
+          <a:p>
+            <a:pPr>
+              <a:lnSpc>
+                <a:spcPct val="100000"/>
+              </a:lnSpc>
+            </a:pPr>
+            <a:r>
+              <a:rPr b="0" lang="en-US" sz="1200" spc="-1" strike="noStrike">
+                <a:solidFill>
+                  <a:srgbClr val="000000"/>
+                </a:solidFill>
+                <a:latin typeface="Noto Sans KR"/>
+              </a:rPr>
+              <a:t>  </a:t>
+            </a:r>
+            <a:r>
+              <a:rPr b="0" lang="ko-KR" sz="1200" spc="-1" strike="noStrike">
+                <a:solidFill>
+                  <a:srgbClr val="000000"/>
+                </a:solidFill>
+                <a:latin typeface="Noto Sans KR"/>
+              </a:rPr>
+              <a:t>적립내역 조회</a:t>
+            </a:r>
+            <a:endParaRPr b="0" lang="en-US" sz="1200" spc="-1" strike="noStrike">
+              <a:solidFill>
+                <a:srgbClr val="000000"/>
+              </a:solidFill>
+              <a:latin typeface="Noto Sans KR"/>
+            </a:endParaRPr>
+          </a:p>
+        </p:txBody>
+      </p:sp>
+      <p:sp>
+        <p:nvSpPr>
+          <p:cNvPr id="116" name=""/>
+          <p:cNvSpPr/>
+          <p:nvPr/>
+        </p:nvSpPr>
+        <p:spPr>
+          <a:xfrm>
+            <a:off x="651240" y="2340000"/>
+            <a:ext cx="1260360" cy="272880"/>
+          </a:xfrm>
+          <a:prstGeom prst="rect">
+            <a:avLst/>
+          </a:prstGeom>
+          <a:noFill/>
+          <a:ln w="0">
+            <a:noFill/>
+          </a:ln>
+        </p:spPr>
+        <p:style>
+          <a:lnRef idx="0"/>
+          <a:fillRef idx="0"/>
+          <a:effectRef idx="0"/>
+          <a:fontRef idx="minor"/>
+        </p:style>
+        <p:txBody>
+          <a:bodyPr lIns="90000" rIns="90000" tIns="45000" bIns="45000" anchor="t">
+            <a:noAutofit/>
+          </a:bodyPr>
+          <a:p>
+            <a:pPr>
+              <a:lnSpc>
+                <a:spcPct val="100000"/>
+              </a:lnSpc>
+            </a:pPr>
+            <a:r>
+              <a:rPr b="0" lang="en-US" sz="1200" spc="-1" strike="noStrike">
+                <a:solidFill>
+                  <a:srgbClr val="000000"/>
+                </a:solidFill>
+                <a:latin typeface="Noto Sans KR"/>
+              </a:rPr>
+              <a:t>  </a:t>
+            </a:r>
+            <a:r>
+              <a:rPr b="0" lang="ko-KR" sz="1200" spc="-1" strike="noStrike">
+                <a:solidFill>
+                  <a:srgbClr val="000000"/>
+                </a:solidFill>
+                <a:latin typeface="Noto Sans KR"/>
+              </a:rPr>
+              <a:t>회원 정보 조회</a:t>
+            </a:r>
+            <a:endParaRPr b="0" lang="en-US" sz="1200" spc="-1" strike="noStrike">
+              <a:solidFill>
+                <a:srgbClr val="000000"/>
+              </a:solidFill>
+              <a:latin typeface="Noto Sans KR"/>
+            </a:endParaRPr>
+          </a:p>
+        </p:txBody>
+      </p:sp>
+      <p:sp>
+        <p:nvSpPr>
+          <p:cNvPr id="117" name=""/>
+          <p:cNvSpPr/>
+          <p:nvPr/>
+        </p:nvSpPr>
+        <p:spPr>
+          <a:xfrm>
+            <a:off x="651240" y="1891080"/>
+            <a:ext cx="1260360" cy="272880"/>
+          </a:xfrm>
+          <a:prstGeom prst="rect">
+            <a:avLst/>
+          </a:prstGeom>
+          <a:noFill/>
+          <a:ln w="0">
+            <a:noFill/>
+          </a:ln>
+        </p:spPr>
+        <p:style>
+          <a:lnRef idx="0"/>
+          <a:fillRef idx="0"/>
+          <a:effectRef idx="0"/>
+          <a:fontRef idx="minor"/>
+        </p:style>
+        <p:txBody>
+          <a:bodyPr lIns="90000" rIns="90000" tIns="45000" bIns="45000" anchor="t">
+            <a:noAutofit/>
+          </a:bodyPr>
+          <a:p>
+            <a:pPr>
+              <a:lnSpc>
+                <a:spcPct val="100000"/>
+              </a:lnSpc>
+            </a:pPr>
+            <a:r>
+              <a:rPr b="0" lang="en-US" sz="1200" spc="-1" strike="noStrike">
+                <a:solidFill>
+                  <a:srgbClr val="000000"/>
+                </a:solidFill>
+                <a:latin typeface="Noto Sans KR"/>
+              </a:rPr>
+              <a:t>  </a:t>
+            </a:r>
+            <a:r>
+              <a:rPr b="0" lang="ko-KR" sz="1200" spc="-1" strike="noStrike">
+                <a:solidFill>
+                  <a:srgbClr val="000000"/>
+                </a:solidFill>
+                <a:latin typeface="Noto Sans KR"/>
+              </a:rPr>
+              <a:t>적립내역 조회</a:t>
+            </a:r>
+            <a:endParaRPr b="0" lang="en-US" sz="1200" spc="-1" strike="noStrike">
+              <a:solidFill>
+                <a:srgbClr val="000000"/>
+              </a:solidFill>
+              <a:latin typeface="Noto Sans KR"/>
+            </a:endParaRPr>
+          </a:p>
+        </p:txBody>
+      </p:sp>
+      <p:sp>
+        <p:nvSpPr>
+          <p:cNvPr id="118" name=""/>
+          <p:cNvSpPr/>
+          <p:nvPr/>
+        </p:nvSpPr>
+        <p:spPr>
+          <a:xfrm>
+            <a:off x="651240" y="2880000"/>
+            <a:ext cx="1260360" cy="272880"/>
+          </a:xfrm>
+          <a:prstGeom prst="rect">
+            <a:avLst/>
+          </a:prstGeom>
+          <a:noFill/>
+          <a:ln w="0">
+            <a:noFill/>
+          </a:ln>
+        </p:spPr>
+        <p:style>
+          <a:lnRef idx="0"/>
+          <a:fillRef idx="0"/>
+          <a:effectRef idx="0"/>
+          <a:fontRef idx="minor"/>
+        </p:style>
+        <p:txBody>
+          <a:bodyPr lIns="90000" rIns="90000" tIns="45000" bIns="45000" anchor="t">
+            <a:noAutofit/>
+          </a:bodyPr>
+          <a:p>
+            <a:pPr>
+              <a:lnSpc>
+                <a:spcPct val="100000"/>
+              </a:lnSpc>
+            </a:pPr>
+            <a:r>
+              <a:rPr b="0" lang="en-US" sz="1200" spc="-1" strike="noStrike">
+                <a:solidFill>
+                  <a:srgbClr val="000000"/>
+                </a:solidFill>
+                <a:latin typeface="Noto Sans KR"/>
+              </a:rPr>
+              <a:t>  </a:t>
+            </a:r>
+            <a:r>
+              <a:rPr b="0" lang="ko-KR" sz="1200" spc="-1" strike="noStrike">
+                <a:solidFill>
+                  <a:srgbClr val="000000"/>
+                </a:solidFill>
+                <a:latin typeface="Noto Sans KR"/>
+              </a:rPr>
+              <a:t>회원 정보 조회</a:t>
+            </a:r>
+            <a:endParaRPr b="0" lang="en-US" sz="1200" spc="-1" strike="noStrike">
+              <a:solidFill>
+                <a:srgbClr val="000000"/>
+              </a:solidFill>
+              <a:latin typeface="Noto Sans KR"/>
+            </a:endParaRPr>
+          </a:p>
+        </p:txBody>
+      </p:sp>
+      <p:sp>
+        <p:nvSpPr>
+          <p:cNvPr id="119" name="모서리가 둥근 직사각형 15"/>
+          <p:cNvSpPr/>
+          <p:nvPr/>
+        </p:nvSpPr>
+        <p:spPr>
+          <a:xfrm>
+            <a:off x="720000" y="2880000"/>
+            <a:ext cx="1078920" cy="358920"/>
           </a:xfrm>
           <a:prstGeom prst="roundRect">
             <a:avLst>
@@ -10936,58 +11209,6 @@
                 <a:schemeClr val="lt1"/>
               </a:solidFill>
               <a:latin typeface="맑은 고딕"/>
-            </a:endParaRPr>
-          </a:p>
-        </p:txBody>
-      </p:sp>
-      <p:sp>
-        <p:nvSpPr>
-          <p:cNvPr id="115" name=""/>
-          <p:cNvSpPr/>
-          <p:nvPr/>
-        </p:nvSpPr>
-        <p:spPr>
-          <a:xfrm>
-            <a:off x="10800000" y="1080000"/>
-            <a:ext cx="899640" cy="5507640"/>
-          </a:xfrm>
-          <a:prstGeom prst="downArrow">
-            <a:avLst>
-              <a:gd name="adj1" fmla="val 50000"/>
-              <a:gd name="adj2" fmla="val 153000"/>
-            </a:avLst>
-          </a:prstGeom>
-          <a:solidFill>
-            <a:srgbClr val="1c1c1c"/>
-          </a:solidFill>
-          <a:ln w="12600">
-            <a:solidFill>
-              <a:srgbClr val="111111"/>
-            </a:solidFill>
-            <a:round/>
-          </a:ln>
-        </p:spPr>
-        <p:style>
-          <a:lnRef idx="0"/>
-          <a:fillRef idx="0"/>
-          <a:effectRef idx="0"/>
-          <a:fontRef idx="minor"/>
-        </p:style>
-        <p:txBody>
-          <a:bodyPr lIns="96120" rIns="96120" tIns="51120" bIns="51120" anchor="ctr">
-            <a:noAutofit/>
-          </a:bodyPr>
-          <a:p>
-            <a:pPr>
-              <a:lnSpc>
-                <a:spcPct val="100000"/>
-              </a:lnSpc>
-            </a:pPr>
-            <a:endParaRPr b="0" lang="en-US" sz="1800" spc="-1" strike="noStrike">
-              <a:solidFill>
-                <a:srgbClr val="ffffff"/>
-              </a:solidFill>
-              <a:latin typeface="Noto Sans KR"/>
             </a:endParaRPr>
           </a:p>
         </p:txBody>
